--- a/Docs/Sprint01/DRCCS.pptx
+++ b/Docs/Sprint01/DRCCS.pptx
@@ -14333,6 +14333,16 @@
             </a:pPr>
             <a:r>
               <a:rPr lang="en-US" sz="2800" dirty="0"/>
+              <a:t>Deliverables</a:t>
+            </a:r>
+          </a:p>
+          <a:p>
+            <a:pPr>
+              <a:buFont typeface="Arial" panose="020B0604020202020204" pitchFamily="34" charset="0"/>
+              <a:buChar char="•"/>
+            </a:pPr>
+            <a:r>
+              <a:rPr lang="en-US" sz="2800" dirty="0"/>
               <a:t>Questions</a:t>
             </a:r>
             <a:endParaRPr lang="en-NL" sz="2800" dirty="0"/>
